--- a/03-课件PPT/讲次版/第1章-4-讲次 1-4 · 结构化输出与 LLM Gateway.pptx
+++ b/03-课件PPT/讲次版/第1章-4-讲次 1-4 · 结构化输出与 LLM Gateway.pptx
@@ -8204,7 +8204,7 @@
           <a:noFill/>
         </p:spPr>
         <p:txBody>
-          <a:bodyPr wrap="none" anchor="ctr">
+          <a:bodyPr wrap="square" anchor="ctr">
             <a:spAutoFit/>
           </a:bodyPr>
           <a:lstStyle/>
@@ -8335,7 +8335,7 @@
           <a:noFill/>
         </p:spPr>
         <p:txBody>
-          <a:bodyPr wrap="none" anchor="ctr">
+          <a:bodyPr wrap="square" anchor="ctr">
             <a:spAutoFit/>
           </a:bodyPr>
           <a:lstStyle/>
@@ -8466,7 +8466,7 @@
           <a:noFill/>
         </p:spPr>
         <p:txBody>
-          <a:bodyPr wrap="none" anchor="ctr">
+          <a:bodyPr wrap="square" anchor="ctr">
             <a:spAutoFit/>
           </a:bodyPr>
           <a:lstStyle/>
@@ -8597,7 +8597,7 @@
           <a:noFill/>
         </p:spPr>
         <p:txBody>
-          <a:bodyPr wrap="none" anchor="ctr">
+          <a:bodyPr wrap="square" anchor="ctr">
             <a:spAutoFit/>
           </a:bodyPr>
           <a:lstStyle/>
@@ -8979,7 +8979,7 @@
           <a:noFill/>
         </p:spPr>
         <p:txBody>
-          <a:bodyPr wrap="none" anchor="ctr">
+          <a:bodyPr wrap="square" anchor="ctr">
             <a:spAutoFit/>
           </a:bodyPr>
           <a:lstStyle/>
@@ -8990,7 +8990,7 @@
               </a:lnSpc>
             </a:pPr>
             <a:r>
-              <a:rPr sz="1100" b="1">
+              <a:rPr sz="1300" b="1">
                 <a:solidFill>
                   <a:srgbClr val="0B1D3A"/>
                 </a:solidFill>
@@ -9110,7 +9110,7 @@
           <a:noFill/>
         </p:spPr>
         <p:txBody>
-          <a:bodyPr wrap="none" anchor="ctr">
+          <a:bodyPr wrap="square" anchor="ctr">
             <a:spAutoFit/>
           </a:bodyPr>
           <a:lstStyle/>
@@ -9241,7 +9241,7 @@
           <a:noFill/>
         </p:spPr>
         <p:txBody>
-          <a:bodyPr wrap="none" anchor="ctr">
+          <a:bodyPr wrap="square" anchor="ctr">
             <a:spAutoFit/>
           </a:bodyPr>
           <a:lstStyle/>
@@ -9623,7 +9623,7 @@
           <a:noFill/>
         </p:spPr>
         <p:txBody>
-          <a:bodyPr wrap="none" anchor="ctr">
+          <a:bodyPr wrap="square" anchor="ctr">
             <a:spAutoFit/>
           </a:bodyPr>
           <a:lstStyle/>
@@ -9754,7 +9754,7 @@
           <a:noFill/>
         </p:spPr>
         <p:txBody>
-          <a:bodyPr wrap="none" anchor="ctr">
+          <a:bodyPr wrap="square" anchor="ctr">
             <a:spAutoFit/>
           </a:bodyPr>
           <a:lstStyle/>
@@ -9885,7 +9885,7 @@
           <a:noFill/>
         </p:spPr>
         <p:txBody>
-          <a:bodyPr wrap="none" anchor="ctr">
+          <a:bodyPr wrap="square" anchor="ctr">
             <a:spAutoFit/>
           </a:bodyPr>
           <a:lstStyle/>
@@ -10267,7 +10267,7 @@
           <a:noFill/>
         </p:spPr>
         <p:txBody>
-          <a:bodyPr wrap="none" anchor="ctr">
+          <a:bodyPr wrap="square" anchor="ctr">
             <a:spAutoFit/>
           </a:bodyPr>
           <a:lstStyle/>
@@ -10278,7 +10278,7 @@
               </a:lnSpc>
             </a:pPr>
             <a:r>
-              <a:rPr sz="1100" b="1">
+              <a:rPr sz="1300" b="1">
                 <a:solidFill>
                   <a:srgbClr val="0B1D3A"/>
                 </a:solidFill>
@@ -10398,7 +10398,7 @@
           <a:noFill/>
         </p:spPr>
         <p:txBody>
-          <a:bodyPr wrap="none" anchor="ctr">
+          <a:bodyPr wrap="square" anchor="ctr">
             <a:spAutoFit/>
           </a:bodyPr>
           <a:lstStyle/>
@@ -10529,7 +10529,7 @@
           <a:noFill/>
         </p:spPr>
         <p:txBody>
-          <a:bodyPr wrap="none" anchor="ctr">
+          <a:bodyPr wrap="square" anchor="ctr">
             <a:spAutoFit/>
           </a:bodyPr>
           <a:lstStyle/>
@@ -13546,8 +13546,8 @@
         </p:nvSpPr>
         <p:spPr>
           <a:xfrm>
-            <a:off x="5291137" y="2133600"/>
-            <a:ext cx="1543050" cy="285750"/>
+            <a:off x="5481637" y="2124075"/>
+            <a:ext cx="1162050" cy="304800"/>
           </a:xfrm>
           <a:prstGeom prst="roundRect">
             <a:avLst>
@@ -13594,8 +13594,8 @@
         </p:nvSpPr>
         <p:spPr>
           <a:xfrm>
-            <a:off x="5291137" y="2133600"/>
-            <a:ext cx="1543050" cy="285750"/>
+            <a:off x="5481637" y="2124075"/>
+            <a:ext cx="1162050" cy="304800"/>
           </a:xfrm>
           <a:prstGeom prst="rect">
             <a:avLst/>
@@ -13712,8 +13712,8 @@
         </p:nvSpPr>
         <p:spPr>
           <a:xfrm>
-            <a:off x="2847975" y="2814637"/>
-            <a:ext cx="1543050" cy="285750"/>
+            <a:off x="2909888" y="2805112"/>
+            <a:ext cx="1419225" cy="304800"/>
           </a:xfrm>
           <a:prstGeom prst="roundRect">
             <a:avLst>
@@ -13760,8 +13760,8 @@
         </p:nvSpPr>
         <p:spPr>
           <a:xfrm>
-            <a:off x="2847975" y="2814637"/>
-            <a:ext cx="1543050" cy="285750"/>
+            <a:off x="2909888" y="2805112"/>
+            <a:ext cx="1419225" cy="304800"/>
           </a:xfrm>
           <a:prstGeom prst="rect">
             <a:avLst/>
@@ -13786,7 +13786,7 @@
                 </a:solidFill>
                 <a:latin typeface="PingFang SC"/>
               </a:rPr>
-              <a:t>primar</a:t>
+              <a:t>primary 42</a:t>
             </a:r>
           </a:p>
         </p:txBody>
@@ -13878,8 +13878,8 @@
         </p:nvSpPr>
         <p:spPr>
           <a:xfrm>
-            <a:off x="5567362" y="2133600"/>
-            <a:ext cx="1123950" cy="285750"/>
+            <a:off x="5567362" y="2124075"/>
+            <a:ext cx="1123950" cy="304800"/>
           </a:xfrm>
           <a:prstGeom prst="roundRect">
             <a:avLst>
@@ -13926,8 +13926,8 @@
         </p:nvSpPr>
         <p:spPr>
           <a:xfrm>
-            <a:off x="5567362" y="2133600"/>
-            <a:ext cx="1123950" cy="285750"/>
+            <a:off x="5567362" y="2124075"/>
+            <a:ext cx="1123950" cy="304800"/>
           </a:xfrm>
           <a:prstGeom prst="rect">
             <a:avLst/>
@@ -14044,8 +14044,8 @@
         </p:nvSpPr>
         <p:spPr>
           <a:xfrm>
-            <a:off x="5291137" y="3562350"/>
-            <a:ext cx="1543050" cy="285750"/>
+            <a:off x="5329237" y="3552825"/>
+            <a:ext cx="1466850" cy="304800"/>
           </a:xfrm>
           <a:prstGeom prst="roundRect">
             <a:avLst>
@@ -14092,8 +14092,8 @@
         </p:nvSpPr>
         <p:spPr>
           <a:xfrm>
-            <a:off x="5291137" y="3562350"/>
-            <a:ext cx="1543050" cy="285750"/>
+            <a:off x="5329237" y="3552825"/>
+            <a:ext cx="1466850" cy="304800"/>
           </a:xfrm>
           <a:prstGeom prst="rect">
             <a:avLst/>
@@ -14118,7 +14118,7 @@
                 </a:solidFill>
                 <a:latin typeface="PingFang SC"/>
               </a:rPr>
-              <a:t>fast 亦</a:t>
+              <a:t>fast 亦失败</a:t>
             </a:r>
           </a:p>
         </p:txBody>
@@ -25104,8 +25104,8 @@
         </p:nvSpPr>
         <p:spPr>
           <a:xfrm>
-            <a:off x="3849687" y="2133600"/>
-            <a:ext cx="1123950" cy="285750"/>
+            <a:off x="3849687" y="2124075"/>
+            <a:ext cx="1123950" cy="304800"/>
           </a:xfrm>
           <a:prstGeom prst="roundRect">
             <a:avLst>
@@ -25152,8 +25152,8 @@
         </p:nvSpPr>
         <p:spPr>
           <a:xfrm>
-            <a:off x="3849687" y="2133600"/>
-            <a:ext cx="1123950" cy="285750"/>
+            <a:off x="3849687" y="2124075"/>
+            <a:ext cx="1123950" cy="304800"/>
           </a:xfrm>
           <a:prstGeom prst="rect">
             <a:avLst/>
@@ -25270,8 +25270,8 @@
         </p:nvSpPr>
         <p:spPr>
           <a:xfrm>
-            <a:off x="7151687" y="2133600"/>
-            <a:ext cx="1123950" cy="285750"/>
+            <a:off x="7151687" y="2124075"/>
+            <a:ext cx="1123950" cy="304800"/>
           </a:xfrm>
           <a:prstGeom prst="roundRect">
             <a:avLst>
@@ -25318,8 +25318,8 @@
         </p:nvSpPr>
         <p:spPr>
           <a:xfrm>
-            <a:off x="7151687" y="2133600"/>
-            <a:ext cx="1123950" cy="285750"/>
+            <a:off x="7151687" y="2124075"/>
+            <a:ext cx="1123950" cy="304800"/>
           </a:xfrm>
           <a:prstGeom prst="rect">
             <a:avLst/>
@@ -25356,199 +25356,341 @@
           <p:nvPr/>
         </p:nvCxnSpPr>
         <p:spPr>
-          <a:xfrm flipV="1">
-            <a:off x="9398000" y="1562100"/>
-            <a:ext cx="0" cy="419100"/>
+          <a:xfrm>
+            <a:off x="3889375" y="3705225"/>
+            <a:ext cx="1044575" cy="0"/>
           </a:xfrm>
           <a:prstGeom prst="line">
             <a:avLst/>
           </a:prstGeom>
+          <a:ln w="19050">
+            <a:solidFill>
+              <a:srgbClr val="2563EB"/>
+            </a:solidFill>
+          </a:ln>
+        </p:spPr>
+        <p:style>
+          <a:lnRef idx="2">
+            <a:schemeClr val="accent1"/>
+          </a:lnRef>
+          <a:fillRef idx="0">
+            <a:schemeClr val="accent1"/>
+          </a:fillRef>
+          <a:effectRef idx="1">
+            <a:schemeClr val="accent1"/>
+          </a:effectRef>
+          <a:fontRef idx="minor">
+            <a:schemeClr val="tx1"/>
+          </a:fontRef>
+        </p:style>
+      </p:cxnSp>
+      <p:sp>
+        <p:nvSpPr>
+          <p:cNvPr id="26" name="Isosceles Triangle 25"/>
+          <p:cNvSpPr/>
+          <p:nvPr/>
+        </p:nvSpPr>
+        <p:spPr>
+          <a:xfrm rot="5400000">
+            <a:off x="4848226" y="3662363"/>
+            <a:ext cx="85725" cy="85725"/>
+          </a:xfrm>
+          <a:prstGeom prst="triangle">
+            <a:avLst/>
+          </a:prstGeom>
+          <a:solidFill>
+            <a:srgbClr val="2563EB"/>
+          </a:solidFill>
+          <a:ln>
+            <a:noFill/>
+          </a:ln>
+          <a:effectLst/>
+        </p:spPr>
+        <p:style>
+          <a:lnRef idx="1">
+            <a:schemeClr val="accent1"/>
+          </a:lnRef>
+          <a:fillRef idx="3">
+            <a:schemeClr val="accent1"/>
+          </a:fillRef>
+          <a:effectRef idx="2">
+            <a:schemeClr val="accent1"/>
+          </a:effectRef>
+          <a:fontRef idx="minor">
+            <a:schemeClr val="lt1"/>
+          </a:fontRef>
+        </p:style>
+        <p:txBody>
+          <a:bodyPr rtlCol="0" anchor="ctr"/>
+          <a:lstStyle/>
+          <a:p>
+            <a:pPr algn="ctr"/>
+          </a:p>
+        </p:txBody>
+      </p:sp>
+      <p:sp>
+        <p:nvSpPr>
+          <p:cNvPr id="27" name="Rounded Rectangle 26"/>
+          <p:cNvSpPr/>
+          <p:nvPr/>
+        </p:nvSpPr>
+        <p:spPr>
+          <a:xfrm>
+            <a:off x="3649662" y="3552825"/>
+            <a:ext cx="1524000" cy="304800"/>
+          </a:xfrm>
+          <a:prstGeom prst="roundRect">
+            <a:avLst>
+              <a:gd name="adj" fmla="val 8000"/>
+            </a:avLst>
+          </a:prstGeom>
+          <a:solidFill>
+            <a:srgbClr val="FFFFFF"/>
+          </a:solidFill>
           <a:ln w="12700">
             <a:solidFill>
               <a:srgbClr val="DDE5EE"/>
             </a:solidFill>
-            <a:prstDash val="dash"/>
-          </a:ln>
-          <a:effectLst/>
-        </p:spPr>
-        <p:style>
-          <a:lnRef idx="2">
-            <a:schemeClr val="accent1"/>
-          </a:lnRef>
-          <a:fillRef idx="0">
-            <a:schemeClr val="accent1"/>
-          </a:fillRef>
-          <a:effectRef idx="1">
-            <a:schemeClr val="accent1"/>
-          </a:effectRef>
-          <a:fontRef idx="minor">
-            <a:schemeClr val="tx1"/>
-          </a:fontRef>
-        </p:style>
-      </p:cxnSp>
+          </a:ln>
+          <a:effectLst/>
+        </p:spPr>
+        <p:style>
+          <a:lnRef idx="1">
+            <a:schemeClr val="accent1"/>
+          </a:lnRef>
+          <a:fillRef idx="3">
+            <a:schemeClr val="accent1"/>
+          </a:fillRef>
+          <a:effectRef idx="2">
+            <a:schemeClr val="accent1"/>
+          </a:effectRef>
+          <a:fontRef idx="minor">
+            <a:schemeClr val="lt1"/>
+          </a:fontRef>
+        </p:style>
+        <p:txBody>
+          <a:bodyPr rtlCol="0" anchor="ctr"/>
+          <a:lstStyle/>
+          <a:p>
+            <a:pPr algn="ctr"/>
+          </a:p>
+        </p:txBody>
+      </p:sp>
+      <p:sp>
+        <p:nvSpPr>
+          <p:cNvPr id="28" name="TextBox 27"/>
+          <p:cNvSpPr txBox="1"/>
+          <p:nvPr/>
+        </p:nvSpPr>
+        <p:spPr>
+          <a:xfrm>
+            <a:off x="3649662" y="3552825"/>
+            <a:ext cx="1524000" cy="304800"/>
+          </a:xfrm>
+          <a:prstGeom prst="rect">
+            <a:avLst/>
+          </a:prstGeom>
+          <a:noFill/>
+        </p:spPr>
+        <p:txBody>
+          <a:bodyPr wrap="square" anchor="ctr">
+            <a:spAutoFit/>
+          </a:bodyPr>
+          <a:lstStyle/>
+          <a:p>
+            <a:pPr algn="ctr">
+              <a:lnSpc>
+                <a:spcPct val="100000"/>
+              </a:lnSpc>
+            </a:pPr>
+            <a:r>
+              <a:rPr sz="1100" b="1">
+                <a:solidFill>
+                  <a:srgbClr val="0B1D3A"/>
+                </a:solidFill>
+                <a:latin typeface="PingFang SC"/>
+              </a:rPr>
+              <a:t>无缓存给默认</a:t>
+            </a:r>
+          </a:p>
+        </p:txBody>
+      </p:sp>
       <p:cxnSp>
         <p:nvCxnSpPr>
-          <p:cNvPr id="26" name="Connector 25"/>
+          <p:cNvPr id="29" name="Connector 28"/>
           <p:cNvCxnSpPr/>
           <p:nvPr/>
         </p:nvCxnSpPr>
         <p:spPr>
-          <a:xfrm flipH="1">
-            <a:off x="2794000" y="1562100"/>
-            <a:ext cx="6604000" cy="0"/>
+          <a:xfrm>
+            <a:off x="7191375" y="3705225"/>
+            <a:ext cx="1044575" cy="0"/>
           </a:xfrm>
           <a:prstGeom prst="line">
             <a:avLst/>
           </a:prstGeom>
+          <a:ln w="19050">
+            <a:solidFill>
+              <a:srgbClr val="2563EB"/>
+            </a:solidFill>
+          </a:ln>
+        </p:spPr>
+        <p:style>
+          <a:lnRef idx="2">
+            <a:schemeClr val="accent1"/>
+          </a:lnRef>
+          <a:fillRef idx="0">
+            <a:schemeClr val="accent1"/>
+          </a:fillRef>
+          <a:effectRef idx="1">
+            <a:schemeClr val="accent1"/>
+          </a:effectRef>
+          <a:fontRef idx="minor">
+            <a:schemeClr val="tx1"/>
+          </a:fontRef>
+        </p:style>
+      </p:cxnSp>
+      <p:sp>
+        <p:nvSpPr>
+          <p:cNvPr id="30" name="Isosceles Triangle 29"/>
+          <p:cNvSpPr/>
+          <p:nvPr/>
+        </p:nvSpPr>
+        <p:spPr>
+          <a:xfrm rot="5400000">
+            <a:off x="8150226" y="3662363"/>
+            <a:ext cx="85725" cy="85725"/>
+          </a:xfrm>
+          <a:prstGeom prst="triangle">
+            <a:avLst/>
+          </a:prstGeom>
+          <a:solidFill>
+            <a:srgbClr val="2563EB"/>
+          </a:solidFill>
+          <a:ln>
+            <a:noFill/>
+          </a:ln>
+          <a:effectLst/>
+        </p:spPr>
+        <p:style>
+          <a:lnRef idx="1">
+            <a:schemeClr val="accent1"/>
+          </a:lnRef>
+          <a:fillRef idx="3">
+            <a:schemeClr val="accent1"/>
+          </a:fillRef>
+          <a:effectRef idx="2">
+            <a:schemeClr val="accent1"/>
+          </a:effectRef>
+          <a:fontRef idx="minor">
+            <a:schemeClr val="lt1"/>
+          </a:fontRef>
+        </p:style>
+        <p:txBody>
+          <a:bodyPr rtlCol="0" anchor="ctr"/>
+          <a:lstStyle/>
+          <a:p>
+            <a:pPr algn="ctr"/>
+          </a:p>
+        </p:txBody>
+      </p:sp>
+      <p:sp>
+        <p:nvSpPr>
+          <p:cNvPr id="31" name="Rounded Rectangle 30"/>
+          <p:cNvSpPr/>
+          <p:nvPr/>
+        </p:nvSpPr>
+        <p:spPr>
+          <a:xfrm>
+            <a:off x="7051675" y="3552825"/>
+            <a:ext cx="1323975" cy="304800"/>
+          </a:xfrm>
+          <a:prstGeom prst="roundRect">
+            <a:avLst>
+              <a:gd name="adj" fmla="val 8000"/>
+            </a:avLst>
+          </a:prstGeom>
+          <a:solidFill>
+            <a:srgbClr val="FFFFFF"/>
+          </a:solidFill>
           <a:ln w="12700">
             <a:solidFill>
               <a:srgbClr val="DDE5EE"/>
             </a:solidFill>
-            <a:prstDash val="dash"/>
-          </a:ln>
-          <a:effectLst/>
-        </p:spPr>
-        <p:style>
-          <a:lnRef idx="2">
-            <a:schemeClr val="accent1"/>
-          </a:lnRef>
-          <a:fillRef idx="0">
-            <a:schemeClr val="accent1"/>
-          </a:fillRef>
-          <a:effectRef idx="1">
-            <a:schemeClr val="accent1"/>
-          </a:effectRef>
-          <a:fontRef idx="minor">
-            <a:schemeClr val="tx1"/>
-          </a:fontRef>
-        </p:style>
-      </p:cxnSp>
-      <p:cxnSp>
-        <p:nvCxnSpPr>
-          <p:cNvPr id="27" name="Connector 26"/>
-          <p:cNvCxnSpPr/>
-          <p:nvPr/>
-        </p:nvCxnSpPr>
-        <p:spPr>
-          <a:xfrm>
-            <a:off x="2794000" y="1562100"/>
-            <a:ext cx="0" cy="1781175"/>
-          </a:xfrm>
-          <a:prstGeom prst="line">
-            <a:avLst/>
-          </a:prstGeom>
-          <a:ln w="12700">
-            <a:solidFill>
-              <a:srgbClr val="DDE5EE"/>
-            </a:solidFill>
-            <a:prstDash val="dash"/>
-          </a:ln>
-          <a:effectLst/>
-        </p:spPr>
-        <p:style>
-          <a:lnRef idx="2">
-            <a:schemeClr val="accent1"/>
-          </a:lnRef>
-          <a:fillRef idx="0">
-            <a:schemeClr val="accent1"/>
-          </a:fillRef>
-          <a:effectRef idx="1">
-            <a:schemeClr val="accent1"/>
-          </a:effectRef>
-          <a:fontRef idx="minor">
-            <a:schemeClr val="tx1"/>
-          </a:fontRef>
-        </p:style>
-      </p:cxnSp>
-      <p:cxnSp>
-        <p:nvCxnSpPr>
-          <p:cNvPr id="28" name="Connector 27"/>
-          <p:cNvCxnSpPr/>
-          <p:nvPr/>
-        </p:nvCxnSpPr>
-        <p:spPr>
-          <a:xfrm>
-            <a:off x="3889375" y="3705225"/>
-            <a:ext cx="1044575" cy="0"/>
-          </a:xfrm>
-          <a:prstGeom prst="line">
-            <a:avLst/>
-          </a:prstGeom>
-          <a:ln w="19050">
-            <a:solidFill>
-              <a:srgbClr val="2563EB"/>
-            </a:solidFill>
-          </a:ln>
-        </p:spPr>
-        <p:style>
-          <a:lnRef idx="2">
-            <a:schemeClr val="accent1"/>
-          </a:lnRef>
-          <a:fillRef idx="0">
-            <a:schemeClr val="accent1"/>
-          </a:fillRef>
-          <a:effectRef idx="1">
-            <a:schemeClr val="accent1"/>
-          </a:effectRef>
-          <a:fontRef idx="minor">
-            <a:schemeClr val="tx1"/>
-          </a:fontRef>
-        </p:style>
-      </p:cxnSp>
-      <p:sp>
-        <p:nvSpPr>
-          <p:cNvPr id="29" name="Isosceles Triangle 28"/>
-          <p:cNvSpPr/>
-          <p:nvPr/>
-        </p:nvSpPr>
-        <p:spPr>
-          <a:xfrm rot="5400000">
-            <a:off x="4848226" y="3662363"/>
-            <a:ext cx="85725" cy="85725"/>
-          </a:xfrm>
-          <a:prstGeom prst="triangle">
-            <a:avLst/>
-          </a:prstGeom>
-          <a:solidFill>
-            <a:srgbClr val="2563EB"/>
-          </a:solidFill>
-          <a:ln>
-            <a:noFill/>
-          </a:ln>
-          <a:effectLst/>
-        </p:spPr>
-        <p:style>
-          <a:lnRef idx="1">
-            <a:schemeClr val="accent1"/>
-          </a:lnRef>
-          <a:fillRef idx="3">
-            <a:schemeClr val="accent1"/>
-          </a:fillRef>
-          <a:effectRef idx="2">
-            <a:schemeClr val="accent1"/>
-          </a:effectRef>
-          <a:fontRef idx="minor">
-            <a:schemeClr val="lt1"/>
-          </a:fontRef>
-        </p:style>
-        <p:txBody>
-          <a:bodyPr rtlCol="0" anchor="ctr"/>
-          <a:lstStyle/>
-          <a:p>
-            <a:pPr algn="ctr"/>
-          </a:p>
-        </p:txBody>
-      </p:sp>
-      <p:sp>
-        <p:nvSpPr>
-          <p:cNvPr id="30" name="Rounded Rectangle 29"/>
-          <p:cNvSpPr/>
-          <p:nvPr/>
-        </p:nvSpPr>
-        <p:spPr>
-          <a:xfrm>
-            <a:off x="3640137" y="3562350"/>
-            <a:ext cx="1543050" cy="285750"/>
+          </a:ln>
+          <a:effectLst/>
+        </p:spPr>
+        <p:style>
+          <a:lnRef idx="1">
+            <a:schemeClr val="accent1"/>
+          </a:lnRef>
+          <a:fillRef idx="3">
+            <a:schemeClr val="accent1"/>
+          </a:fillRef>
+          <a:effectRef idx="2">
+            <a:schemeClr val="accent1"/>
+          </a:effectRef>
+          <a:fontRef idx="minor">
+            <a:schemeClr val="lt1"/>
+          </a:fontRef>
+        </p:style>
+        <p:txBody>
+          <a:bodyPr rtlCol="0" anchor="ctr"/>
+          <a:lstStyle/>
+          <a:p>
+            <a:pPr algn="ctr"/>
+          </a:p>
+        </p:txBody>
+      </p:sp>
+      <p:sp>
+        <p:nvSpPr>
+          <p:cNvPr id="32" name="TextBox 31"/>
+          <p:cNvSpPr txBox="1"/>
+          <p:nvPr/>
+        </p:nvSpPr>
+        <p:spPr>
+          <a:xfrm>
+            <a:off x="7051675" y="3552825"/>
+            <a:ext cx="1323975" cy="304800"/>
+          </a:xfrm>
+          <a:prstGeom prst="rect">
+            <a:avLst/>
+          </a:prstGeom>
+          <a:noFill/>
+        </p:spPr>
+        <p:txBody>
+          <a:bodyPr wrap="square" anchor="ctr">
+            <a:spAutoFit/>
+          </a:bodyPr>
+          <a:lstStyle/>
+          <a:p>
+            <a:pPr algn="ctr">
+              <a:lnSpc>
+                <a:spcPct val="100000"/>
+              </a:lnSpc>
+            </a:pPr>
+            <a:r>
+              <a:rPr sz="1100" b="1">
+                <a:solidFill>
+                  <a:srgbClr val="0B1D3A"/>
+                </a:solidFill>
+                <a:latin typeface="PingFang SC"/>
+              </a:rPr>
+              <a:t>高危转人工</a:t>
+            </a:r>
+          </a:p>
+        </p:txBody>
+      </p:sp>
+      <p:sp>
+        <p:nvSpPr>
+          <p:cNvPr id="33" name="Rounded Rectangle 32"/>
+          <p:cNvSpPr/>
+          <p:nvPr/>
+        </p:nvSpPr>
+        <p:spPr>
+          <a:xfrm>
+            <a:off x="1143000" y="6229350"/>
+            <a:ext cx="9906000" cy="381000"/>
           </a:xfrm>
           <a:prstGeom prst="roundRect">
             <a:avLst>
@@ -25556,127 +25698,7 @@
             </a:avLst>
           </a:prstGeom>
           <a:solidFill>
-            <a:srgbClr val="FFFFFF"/>
-          </a:solidFill>
-          <a:ln w="12700">
-            <a:solidFill>
-              <a:srgbClr val="DDE5EE"/>
-            </a:solidFill>
-          </a:ln>
-          <a:effectLst/>
-        </p:spPr>
-        <p:style>
-          <a:lnRef idx="1">
-            <a:schemeClr val="accent1"/>
-          </a:lnRef>
-          <a:fillRef idx="3">
-            <a:schemeClr val="accent1"/>
-          </a:fillRef>
-          <a:effectRef idx="2">
-            <a:schemeClr val="accent1"/>
-          </a:effectRef>
-          <a:fontRef idx="minor">
-            <a:schemeClr val="lt1"/>
-          </a:fontRef>
-        </p:style>
-        <p:txBody>
-          <a:bodyPr rtlCol="0" anchor="ctr"/>
-          <a:lstStyle/>
-          <a:p>
-            <a:pPr algn="ctr"/>
-          </a:p>
-        </p:txBody>
-      </p:sp>
-      <p:sp>
-        <p:nvSpPr>
-          <p:cNvPr id="31" name="TextBox 30"/>
-          <p:cNvSpPr txBox="1"/>
-          <p:nvPr/>
-        </p:nvSpPr>
-        <p:spPr>
-          <a:xfrm>
-            <a:off x="3640137" y="3562350"/>
-            <a:ext cx="1543050" cy="285750"/>
-          </a:xfrm>
-          <a:prstGeom prst="rect">
-            <a:avLst/>
-          </a:prstGeom>
-          <a:noFill/>
-        </p:spPr>
-        <p:txBody>
-          <a:bodyPr wrap="square" anchor="ctr">
-            <a:spAutoFit/>
-          </a:bodyPr>
-          <a:lstStyle/>
-          <a:p>
-            <a:pPr algn="ctr">
-              <a:lnSpc>
-                <a:spcPct val="100000"/>
-              </a:lnSpc>
-            </a:pPr>
-            <a:r>
-              <a:rPr sz="1100" b="1">
-                <a:solidFill>
-                  <a:srgbClr val="0B1D3A"/>
-                </a:solidFill>
-                <a:latin typeface="PingFang SC"/>
-              </a:rPr>
-              <a:t>无缓存给默认</a:t>
-            </a:r>
-          </a:p>
-        </p:txBody>
-      </p:sp>
-      <p:cxnSp>
-        <p:nvCxnSpPr>
-          <p:cNvPr id="32" name="Connector 31"/>
-          <p:cNvCxnSpPr/>
-          <p:nvPr/>
-        </p:nvCxnSpPr>
-        <p:spPr>
-          <a:xfrm>
-            <a:off x="7191375" y="3705225"/>
-            <a:ext cx="1044575" cy="0"/>
-          </a:xfrm>
-          <a:prstGeom prst="line">
-            <a:avLst/>
-          </a:prstGeom>
-          <a:ln w="19050">
-            <a:solidFill>
-              <a:srgbClr val="2563EB"/>
-            </a:solidFill>
-          </a:ln>
-        </p:spPr>
-        <p:style>
-          <a:lnRef idx="2">
-            <a:schemeClr val="accent1"/>
-          </a:lnRef>
-          <a:fillRef idx="0">
-            <a:schemeClr val="accent1"/>
-          </a:fillRef>
-          <a:effectRef idx="1">
-            <a:schemeClr val="accent1"/>
-          </a:effectRef>
-          <a:fontRef idx="minor">
-            <a:schemeClr val="tx1"/>
-          </a:fontRef>
-        </p:style>
-      </p:cxnSp>
-      <p:sp>
-        <p:nvSpPr>
-          <p:cNvPr id="33" name="Isosceles Triangle 32"/>
-          <p:cNvSpPr/>
-          <p:nvPr/>
-        </p:nvSpPr>
-        <p:spPr>
-          <a:xfrm rot="5400000">
-            <a:off x="8150226" y="3662363"/>
-            <a:ext cx="85725" cy="85725"/>
-          </a:xfrm>
-          <a:prstGeom prst="triangle">
-            <a:avLst/>
-          </a:prstGeom>
-          <a:solidFill>
-            <a:srgbClr val="2563EB"/>
+            <a:srgbClr val="F1F5F9"/>
           </a:solidFill>
           <a:ln>
             <a:noFill/>
@@ -25707,94 +25729,46 @@
       </p:sp>
       <p:sp>
         <p:nvSpPr>
-          <p:cNvPr id="34" name="Rounded Rectangle 33"/>
-          <p:cNvSpPr/>
-          <p:nvPr/>
-        </p:nvSpPr>
-        <p:spPr>
-          <a:xfrm>
-            <a:off x="7046912" y="3562350"/>
-            <a:ext cx="1333500" cy="285750"/>
-          </a:xfrm>
-          <a:prstGeom prst="roundRect">
-            <a:avLst>
-              <a:gd name="adj" fmla="val 8000"/>
-            </a:avLst>
-          </a:prstGeom>
-          <a:solidFill>
-            <a:srgbClr val="FFFFFF"/>
-          </a:solidFill>
-          <a:ln w="12700">
-            <a:solidFill>
-              <a:srgbClr val="DDE5EE"/>
-            </a:solidFill>
-          </a:ln>
-          <a:effectLst/>
-        </p:spPr>
-        <p:style>
-          <a:lnRef idx="1">
-            <a:schemeClr val="accent1"/>
-          </a:lnRef>
-          <a:fillRef idx="3">
-            <a:schemeClr val="accent1"/>
-          </a:fillRef>
-          <a:effectRef idx="2">
-            <a:schemeClr val="accent1"/>
-          </a:effectRef>
-          <a:fontRef idx="minor">
-            <a:schemeClr val="lt1"/>
-          </a:fontRef>
-        </p:style>
-        <p:txBody>
-          <a:bodyPr rtlCol="0" anchor="ctr"/>
-          <a:lstStyle/>
-          <a:p>
-            <a:pPr algn="ctr"/>
+          <p:cNvPr id="34" name="TextBox 33"/>
+          <p:cNvSpPr txBox="1"/>
+          <p:nvPr/>
+        </p:nvSpPr>
+        <p:spPr>
+          <a:xfrm>
+            <a:off x="1295400" y="6229350"/>
+            <a:ext cx="9601200" cy="381000"/>
+          </a:xfrm>
+          <a:prstGeom prst="rect">
+            <a:avLst/>
+          </a:prstGeom>
+          <a:noFill/>
+        </p:spPr>
+        <p:txBody>
+          <a:bodyPr wrap="square" anchor="ctr">
+            <a:spAutoFit/>
+          </a:bodyPr>
+          <a:lstStyle/>
+          <a:p>
+            <a:pPr algn="l">
+              <a:lnSpc>
+                <a:spcPct val="100000"/>
+              </a:lnSpc>
+            </a:pPr>
+            <a:r>
+              <a:rPr sz="1100" b="0">
+                <a:solidFill>
+                  <a:srgbClr val="475569"/>
+                </a:solidFill>
+                <a:latin typeface="PingFang SC"/>
+              </a:rPr>
+              <a:t>非相邻转移:FEEDBACK → CACHED</a:t>
+            </a:r>
           </a:p>
         </p:txBody>
       </p:sp>
       <p:sp>
         <p:nvSpPr>
           <p:cNvPr id="35" name="TextBox 34"/>
-          <p:cNvSpPr txBox="1"/>
-          <p:nvPr/>
-        </p:nvSpPr>
-        <p:spPr>
-          <a:xfrm>
-            <a:off x="7046912" y="3562350"/>
-            <a:ext cx="1333500" cy="285750"/>
-          </a:xfrm>
-          <a:prstGeom prst="rect">
-            <a:avLst/>
-          </a:prstGeom>
-          <a:noFill/>
-        </p:spPr>
-        <p:txBody>
-          <a:bodyPr wrap="square" anchor="ctr">
-            <a:spAutoFit/>
-          </a:bodyPr>
-          <a:lstStyle/>
-          <a:p>
-            <a:pPr algn="ctr">
-              <a:lnSpc>
-                <a:spcPct val="100000"/>
-              </a:lnSpc>
-            </a:pPr>
-            <a:r>
-              <a:rPr sz="1100" b="1">
-                <a:solidFill>
-                  <a:srgbClr val="0B1D3A"/>
-                </a:solidFill>
-                <a:latin typeface="PingFang SC"/>
-              </a:rPr>
-              <a:t>高危转人工</a:t>
-            </a:r>
-          </a:p>
-        </p:txBody>
-      </p:sp>
-      <p:sp>
-        <p:nvSpPr>
-          <p:cNvPr id="36" name="TextBox 35"/>
           <p:cNvSpPr txBox="1"/>
           <p:nvPr/>
         </p:nvSpPr>
@@ -25833,7 +25807,7 @@
       </p:sp>
       <p:sp>
         <p:nvSpPr>
-          <p:cNvPr id="37" name="TextBox 36"/>
+          <p:cNvPr id="36" name="TextBox 35"/>
           <p:cNvSpPr txBox="1"/>
           <p:nvPr/>
         </p:nvSpPr>
@@ -32463,7 +32437,7 @@
       </p:sp>
       <p:pic>
         <p:nvPicPr>
-          <p:cNvPr id="5" name="Picture 4" descr="chart_159431.png"/>
+          <p:cNvPr id="5" name="Picture 4" descr="chart_1033830.png"/>
           <p:cNvPicPr>
             <a:picLocks noChangeAspect="1"/>
           </p:cNvPicPr>
